--- a/Take My Life and Let It Be.pptx
+++ b/Take My Life and Let It Be.pptx
@@ -6,10 +6,11 @@
   </p:sldMasterIdLst>
   <p:sldIdLst>
     <p:sldId id="274" r:id="rId2"/>
-    <p:sldId id="276" r:id="rId3"/>
-    <p:sldId id="277" r:id="rId4"/>
-    <p:sldId id="278" r:id="rId5"/>
-    <p:sldId id="279" r:id="rId6"/>
+    <p:sldId id="280" r:id="rId3"/>
+    <p:sldId id="276" r:id="rId4"/>
+    <p:sldId id="277" r:id="rId5"/>
+    <p:sldId id="278" r:id="rId6"/>
+    <p:sldId id="279" r:id="rId7"/>
   </p:sldIdLst>
   <p:sldSz cx="9144000" cy="6858000" type="screen4x3"/>
   <p:notesSz cx="6858000" cy="9144000"/>
@@ -247,7 +248,7 @@
           <a:p>
             <a:fld id="{E759A0DE-F190-5444-87AC-4719D5F20D15}" type="datetimeFigureOut">
               <a:rPr lang="en-US" smtClean="0"/>
-              <a:t>6/13/26</a:t>
+              <a:t>7/14/26</a:t>
             </a:fld>
             <a:endParaRPr lang="en-US"/>
           </a:p>
@@ -417,7 +418,7 @@
           <a:p>
             <a:fld id="{E759A0DE-F190-5444-87AC-4719D5F20D15}" type="datetimeFigureOut">
               <a:rPr lang="en-US" smtClean="0"/>
-              <a:t>6/13/26</a:t>
+              <a:t>7/14/26</a:t>
             </a:fld>
             <a:endParaRPr lang="en-US"/>
           </a:p>
@@ -597,7 +598,7 @@
           <a:p>
             <a:fld id="{E759A0DE-F190-5444-87AC-4719D5F20D15}" type="datetimeFigureOut">
               <a:rPr lang="en-US" smtClean="0"/>
-              <a:t>6/13/26</a:t>
+              <a:t>7/14/26</a:t>
             </a:fld>
             <a:endParaRPr lang="en-US"/>
           </a:p>
@@ -767,7 +768,7 @@
           <a:p>
             <a:fld id="{E759A0DE-F190-5444-87AC-4719D5F20D15}" type="datetimeFigureOut">
               <a:rPr lang="en-US" smtClean="0"/>
-              <a:t>6/13/26</a:t>
+              <a:t>7/14/26</a:t>
             </a:fld>
             <a:endParaRPr lang="en-US"/>
           </a:p>
@@ -1013,7 +1014,7 @@
           <a:p>
             <a:fld id="{E759A0DE-F190-5444-87AC-4719D5F20D15}" type="datetimeFigureOut">
               <a:rPr lang="en-US" smtClean="0"/>
-              <a:t>6/13/26</a:t>
+              <a:t>7/14/26</a:t>
             </a:fld>
             <a:endParaRPr lang="en-US"/>
           </a:p>
@@ -1245,7 +1246,7 @@
           <a:p>
             <a:fld id="{E759A0DE-F190-5444-87AC-4719D5F20D15}" type="datetimeFigureOut">
               <a:rPr lang="en-US" smtClean="0"/>
-              <a:t>6/13/26</a:t>
+              <a:t>7/14/26</a:t>
             </a:fld>
             <a:endParaRPr lang="en-US"/>
           </a:p>
@@ -1612,7 +1613,7 @@
           <a:p>
             <a:fld id="{E759A0DE-F190-5444-87AC-4719D5F20D15}" type="datetimeFigureOut">
               <a:rPr lang="en-US" smtClean="0"/>
-              <a:t>6/13/26</a:t>
+              <a:t>7/14/26</a:t>
             </a:fld>
             <a:endParaRPr lang="en-US"/>
           </a:p>
@@ -1730,7 +1731,7 @@
           <a:p>
             <a:fld id="{E759A0DE-F190-5444-87AC-4719D5F20D15}" type="datetimeFigureOut">
               <a:rPr lang="en-US" smtClean="0"/>
-              <a:t>6/13/26</a:t>
+              <a:t>7/14/26</a:t>
             </a:fld>
             <a:endParaRPr lang="en-US"/>
           </a:p>
@@ -1825,7 +1826,7 @@
           <a:p>
             <a:fld id="{E759A0DE-F190-5444-87AC-4719D5F20D15}" type="datetimeFigureOut">
               <a:rPr lang="en-US" smtClean="0"/>
-              <a:t>6/13/26</a:t>
+              <a:t>7/14/26</a:t>
             </a:fld>
             <a:endParaRPr lang="en-US"/>
           </a:p>
@@ -2102,7 +2103,7 @@
           <a:p>
             <a:fld id="{E759A0DE-F190-5444-87AC-4719D5F20D15}" type="datetimeFigureOut">
               <a:rPr lang="en-US" smtClean="0"/>
-              <a:t>6/13/26</a:t>
+              <a:t>7/14/26</a:t>
             </a:fld>
             <a:endParaRPr lang="en-US"/>
           </a:p>
@@ -2359,7 +2360,7 @@
           <a:p>
             <a:fld id="{E759A0DE-F190-5444-87AC-4719D5F20D15}" type="datetimeFigureOut">
               <a:rPr lang="en-US" smtClean="0"/>
-              <a:t>6/13/26</a:t>
+              <a:t>7/14/26</a:t>
             </a:fld>
             <a:endParaRPr lang="en-US"/>
           </a:p>
@@ -2572,7 +2573,7 @@
           <a:p>
             <a:fld id="{E759A0DE-F190-5444-87AC-4719D5F20D15}" type="datetimeFigureOut">
               <a:rPr lang="en-US" smtClean="0"/>
-              <a:t>6/13/26</a:t>
+              <a:t>7/14/26</a:t>
             </a:fld>
             <a:endParaRPr lang="en-US"/>
           </a:p>
@@ -3019,26 +3020,9 @@
           </a:bodyPr>
           <a:lstStyle/>
           <a:p>
-            <a:endParaRPr lang="en-US" sz="4000" dirty="0">
-              <a:solidFill>
-                <a:schemeClr val="bg1"/>
-              </a:solidFill>
-              <a:latin typeface="Avenir Medium" panose="02000503020000020003" pitchFamily="2" charset="0"/>
-              <a:ea typeface="Bodoni Ornaments" pitchFamily="2" charset="0"/>
-            </a:endParaRPr>
-          </a:p>
-          <a:p>
-            <a:endParaRPr lang="en-US" sz="4000" dirty="0">
-              <a:solidFill>
-                <a:schemeClr val="bg1"/>
-              </a:solidFill>
-              <a:latin typeface="Avenir Medium" panose="02000503020000020003" pitchFamily="2" charset="0"/>
-              <a:ea typeface="Bodoni Ornaments" pitchFamily="2" charset="0"/>
-            </a:endParaRPr>
-          </a:p>
-          <a:p>
-            <a:r>
-              <a:rPr lang="en-US" sz="4000" dirty="0">
+            <a:pPr algn="l"/>
+            <a:r>
+              <a:rPr lang="en-US" sz="6600" dirty="0">
                 <a:solidFill>
                   <a:schemeClr val="bg1"/>
                 </a:solidFill>
@@ -3048,52 +3032,77 @@
               <a:t>Take my life and let it be </a:t>
             </a:r>
           </a:p>
-          <a:p>
-            <a:r>
-              <a:rPr lang="en-US" sz="4000" dirty="0">
+        </p:txBody>
+      </p:sp>
+      <p:sp>
+        <p:nvSpPr>
+          <p:cNvPr id="2" name="TextBox 1">
+            <a:extLst>
+              <a:ext uri="{FF2B5EF4-FFF2-40B4-BE49-F238E27FC236}">
+                <a16:creationId xmlns:a16="http://schemas.microsoft.com/office/drawing/2014/main" id="{F57DACB5-C4F9-B5CA-56C7-78C9AD28ECC3}"/>
+              </a:ext>
+            </a:extLst>
+          </p:cNvPr>
+          <p:cNvSpPr txBox="1"/>
+          <p:nvPr/>
+        </p:nvSpPr>
+        <p:spPr>
+          <a:xfrm>
+            <a:off x="168442" y="5444311"/>
+            <a:ext cx="8807115" cy="1200329"/>
+          </a:xfrm>
+          <a:prstGeom prst="rect">
+            <a:avLst/>
+          </a:prstGeom>
+          <a:noFill/>
+        </p:spPr>
+        <p:txBody>
+          <a:bodyPr wrap="square" rtlCol="0">
+            <a:spAutoFit/>
+          </a:bodyPr>
+          <a:lstStyle/>
+          <a:p>
+            <a:pPr algn="ctr"/>
+            <a:r>
+              <a:rPr lang="en-US" dirty="0">
                 <a:solidFill>
                   <a:schemeClr val="bg1"/>
                 </a:solidFill>
-                <a:latin typeface="Avenir Medium" panose="02000503020000020003" pitchFamily="2" charset="0"/>
-                <a:ea typeface="Bodoni Ornaments" pitchFamily="2" charset="0"/>
               </a:rPr>
-              <a:t>Consecrated, Lord, to Thee.</a:t>
-            </a:r>
-          </a:p>
-          <a:p>
-            <a:r>
-              <a:rPr lang="en-US" sz="4000" dirty="0">
+              <a:t>Words: Frances R. Havergal, (1874)</a:t>
+            </a:r>
+          </a:p>
+          <a:p>
+            <a:pPr algn="ctr"/>
+            <a:r>
+              <a:rPr lang="en-US" dirty="0">
                 <a:solidFill>
                   <a:schemeClr val="bg1"/>
                 </a:solidFill>
-                <a:latin typeface="Avenir Medium" panose="02000503020000020003" pitchFamily="2" charset="0"/>
-                <a:ea typeface="Bodoni Ornaments" pitchFamily="2" charset="0"/>
               </a:rPr>
-              <a:t>Take my moments and my days, </a:t>
-            </a:r>
-          </a:p>
-          <a:p>
-            <a:r>
-              <a:rPr lang="en-US" sz="4000" dirty="0">
+              <a:t>Music: H. A. César Malan (1837)</a:t>
+            </a:r>
+          </a:p>
+          <a:p>
+            <a:pPr algn="ctr"/>
+            <a:r>
+              <a:rPr lang="en-US" dirty="0">
                 <a:solidFill>
                   <a:schemeClr val="bg1"/>
                 </a:solidFill>
-                <a:latin typeface="Avenir Medium" panose="02000503020000020003" pitchFamily="2" charset="0"/>
-                <a:ea typeface="Bodoni Ornaments" pitchFamily="2" charset="0"/>
               </a:rPr>
-              <a:t>Let them flow in ceaseless praise.</a:t>
-            </a:r>
-          </a:p>
-          <a:p>
-            <a:r>
-              <a:rPr lang="en-US" sz="4000" dirty="0">
+              <a:t>Public Domain</a:t>
+            </a:r>
+          </a:p>
+          <a:p>
+            <a:pPr algn="ctr"/>
+            <a:r>
+              <a:rPr lang="en-US" dirty="0">
                 <a:solidFill>
                   <a:schemeClr val="bg1"/>
                 </a:solidFill>
-                <a:latin typeface="Avenir Medium" panose="02000503020000020003" pitchFamily="2" charset="0"/>
-                <a:ea typeface="Bodoni Ornaments" pitchFamily="2" charset="0"/>
               </a:rPr>
-              <a:t>Let them flow in ceaseless praise</a:t>
+              <a:t>CCLI License #137776</a:t>
             </a:r>
           </a:p>
         </p:txBody>
@@ -3112,6 +3121,157 @@
 </file>
 
 <file path=ppt/slides/slide2.xml><?xml version="1.0" encoding="utf-8"?>
+<p:sld xmlns:a="http://schemas.openxmlformats.org/drawingml/2006/main" xmlns:r="http://schemas.openxmlformats.org/officeDocument/2006/relationships" xmlns:p="http://schemas.openxmlformats.org/presentationml/2006/main">
+  <p:cSld>
+    <p:bg>
+      <p:bgPr>
+        <a:solidFill>
+          <a:schemeClr val="tx1"/>
+        </a:solidFill>
+        <a:effectLst/>
+      </p:bgPr>
+    </p:bg>
+    <p:spTree>
+      <p:nvGrpSpPr>
+        <p:cNvPr id="1" name="">
+          <a:extLst>
+            <a:ext uri="{FF2B5EF4-FFF2-40B4-BE49-F238E27FC236}">
+              <a16:creationId xmlns:a16="http://schemas.microsoft.com/office/drawing/2014/main" id="{2A49C882-69B8-E3EE-9DD6-D597E1D4D090}"/>
+            </a:ext>
+          </a:extLst>
+        </p:cNvPr>
+        <p:cNvGrpSpPr/>
+        <p:nvPr/>
+      </p:nvGrpSpPr>
+      <p:grpSpPr>
+        <a:xfrm>
+          <a:off x="0" y="0"/>
+          <a:ext cx="0" cy="0"/>
+          <a:chOff x="0" y="0"/>
+          <a:chExt cx="0" cy="0"/>
+        </a:xfrm>
+      </p:grpSpPr>
+      <p:sp>
+        <p:nvSpPr>
+          <p:cNvPr id="3" name="Subtitle 2">
+            <a:extLst>
+              <a:ext uri="{FF2B5EF4-FFF2-40B4-BE49-F238E27FC236}">
+                <a16:creationId xmlns:a16="http://schemas.microsoft.com/office/drawing/2014/main" id="{47195F39-A578-0A86-636C-A1A24EDDFCED}"/>
+              </a:ext>
+            </a:extLst>
+          </p:cNvPr>
+          <p:cNvSpPr>
+            <a:spLocks noGrp="1"/>
+          </p:cNvSpPr>
+          <p:nvPr>
+            <p:ph type="subTitle" idx="1"/>
+          </p:nvPr>
+        </p:nvSpPr>
+        <p:spPr>
+          <a:xfrm>
+            <a:off x="84221" y="213360"/>
+            <a:ext cx="8891337" cy="6416040"/>
+          </a:xfrm>
+        </p:spPr>
+        <p:txBody>
+          <a:bodyPr>
+            <a:noAutofit/>
+          </a:bodyPr>
+          <a:lstStyle/>
+          <a:p>
+            <a:endParaRPr lang="en-US" sz="4000" dirty="0">
+              <a:solidFill>
+                <a:schemeClr val="bg1"/>
+              </a:solidFill>
+              <a:latin typeface="Avenir Medium" panose="02000503020000020003" pitchFamily="2" charset="0"/>
+              <a:ea typeface="Bodoni Ornaments" pitchFamily="2" charset="0"/>
+            </a:endParaRPr>
+          </a:p>
+          <a:p>
+            <a:endParaRPr lang="en-US" sz="4000" dirty="0">
+              <a:solidFill>
+                <a:schemeClr val="bg1"/>
+              </a:solidFill>
+              <a:latin typeface="Avenir Medium" panose="02000503020000020003" pitchFamily="2" charset="0"/>
+              <a:ea typeface="Bodoni Ornaments" pitchFamily="2" charset="0"/>
+            </a:endParaRPr>
+          </a:p>
+          <a:p>
+            <a:r>
+              <a:rPr lang="en-US" sz="4000" dirty="0">
+                <a:solidFill>
+                  <a:schemeClr val="bg1"/>
+                </a:solidFill>
+                <a:latin typeface="Avenir Medium" panose="02000503020000020003" pitchFamily="2" charset="0"/>
+                <a:ea typeface="Bodoni Ornaments" pitchFamily="2" charset="0"/>
+              </a:rPr>
+              <a:t>Take my life and let it be </a:t>
+            </a:r>
+          </a:p>
+          <a:p>
+            <a:r>
+              <a:rPr lang="en-US" sz="4000" dirty="0">
+                <a:solidFill>
+                  <a:schemeClr val="bg1"/>
+                </a:solidFill>
+                <a:latin typeface="Avenir Medium" panose="02000503020000020003" pitchFamily="2" charset="0"/>
+                <a:ea typeface="Bodoni Ornaments" pitchFamily="2" charset="0"/>
+              </a:rPr>
+              <a:t>Consecrated, Lord, to Thee</a:t>
+            </a:r>
+          </a:p>
+          <a:p>
+            <a:r>
+              <a:rPr lang="en-US" sz="4000" dirty="0">
+                <a:solidFill>
+                  <a:schemeClr val="bg1"/>
+                </a:solidFill>
+                <a:latin typeface="Avenir Medium" panose="02000503020000020003" pitchFamily="2" charset="0"/>
+                <a:ea typeface="Bodoni Ornaments" pitchFamily="2" charset="0"/>
+              </a:rPr>
+              <a:t>Take my moments and my days, </a:t>
+            </a:r>
+          </a:p>
+          <a:p>
+            <a:r>
+              <a:rPr lang="en-US" sz="4000" dirty="0">
+                <a:solidFill>
+                  <a:schemeClr val="bg1"/>
+                </a:solidFill>
+                <a:latin typeface="Avenir Medium" panose="02000503020000020003" pitchFamily="2" charset="0"/>
+                <a:ea typeface="Bodoni Ornaments" pitchFamily="2" charset="0"/>
+              </a:rPr>
+              <a:t>Let them flow in ceaseless praise</a:t>
+            </a:r>
+          </a:p>
+          <a:p>
+            <a:r>
+              <a:rPr lang="en-US" sz="4000" dirty="0">
+                <a:solidFill>
+                  <a:schemeClr val="bg1"/>
+                </a:solidFill>
+                <a:latin typeface="Avenir Medium" panose="02000503020000020003" pitchFamily="2" charset="0"/>
+                <a:ea typeface="Bodoni Ornaments" pitchFamily="2" charset="0"/>
+              </a:rPr>
+              <a:t>Let them flow in ceaseless praise</a:t>
+            </a:r>
+          </a:p>
+        </p:txBody>
+      </p:sp>
+    </p:spTree>
+    <p:extLst>
+      <p:ext uri="{BB962C8B-B14F-4D97-AF65-F5344CB8AC3E}">
+        <p14:creationId xmlns:p14="http://schemas.microsoft.com/office/powerpoint/2010/main" val="3386650847"/>
+      </p:ext>
+    </p:extLst>
+  </p:cSld>
+  <p:clrMapOvr>
+    <a:masterClrMapping/>
+  </p:clrMapOvr>
+</p:sld>
+</file>
+
+<file path=ppt/slides/slide3.xml><?xml version="1.0" encoding="utf-8"?>
 <p:sld xmlns:a="http://schemas.openxmlformats.org/drawingml/2006/main" xmlns:r="http://schemas.openxmlformats.org/officeDocument/2006/relationships" xmlns:p="http://schemas.openxmlformats.org/presentationml/2006/main">
   <p:cSld>
     <p:bg>
@@ -3262,7 +3422,7 @@
 </p:sld>
 </file>
 
-<file path=ppt/slides/slide3.xml><?xml version="1.0" encoding="utf-8"?>
+<file path=ppt/slides/slide4.xml><?xml version="1.0" encoding="utf-8"?>
 <p:sld xmlns:a="http://schemas.openxmlformats.org/drawingml/2006/main" xmlns:r="http://schemas.openxmlformats.org/officeDocument/2006/relationships" xmlns:p="http://schemas.openxmlformats.org/presentationml/2006/main">
   <p:cSld>
     <p:bg>
@@ -3386,7 +3546,7 @@
                 <a:latin typeface="Avenir Medium" panose="02000503020000020003" pitchFamily="2" charset="0"/>
                 <a:ea typeface="Bodoni Ornaments" pitchFamily="2" charset="0"/>
               </a:rPr>
-              <a:t>Filled with messages from Thee.</a:t>
+              <a:t>Filled with messages from Thee</a:t>
             </a:r>
           </a:p>
           <a:p>
@@ -3413,7 +3573,7 @@
 </p:sld>
 </file>
 
-<file path=ppt/slides/slide4.xml><?xml version="1.0" encoding="utf-8"?>
+<file path=ppt/slides/slide5.xml><?xml version="1.0" encoding="utf-8"?>
 <p:sld xmlns:a="http://schemas.openxmlformats.org/drawingml/2006/main" xmlns:r="http://schemas.openxmlformats.org/officeDocument/2006/relationships" xmlns:p="http://schemas.openxmlformats.org/presentationml/2006/main">
   <p:cSld>
     <p:bg>
@@ -3504,7 +3664,7 @@
                 <a:latin typeface="Avenir Medium" panose="02000503020000020003" pitchFamily="2" charset="0"/>
                 <a:ea typeface="Bodoni Ornaments" pitchFamily="2" charset="0"/>
               </a:rPr>
-              <a:t>It shall be no longer mine.</a:t>
+              <a:t>It shall be no longer mine</a:t>
             </a:r>
           </a:p>
           <a:p>
@@ -3540,7 +3700,7 @@
                 <a:latin typeface="Avenir Medium" panose="02000503020000020003" pitchFamily="2" charset="0"/>
                 <a:ea typeface="Bodoni Ornaments" pitchFamily="2" charset="0"/>
               </a:rPr>
-              <a:t>It shall be Thy royal throne.</a:t>
+              <a:t>It shall be Thy royal throne</a:t>
             </a:r>
           </a:p>
           <a:p>
@@ -3567,7 +3727,7 @@
 </p:sld>
 </file>
 
-<file path=ppt/slides/slide5.xml><?xml version="1.0" encoding="utf-8"?>
+<file path=ppt/slides/slide6.xml><?xml version="1.0" encoding="utf-8"?>
 <p:sld xmlns:a="http://schemas.openxmlformats.org/drawingml/2006/main" xmlns:r="http://schemas.openxmlformats.org/officeDocument/2006/relationships" xmlns:p="http://schemas.openxmlformats.org/presentationml/2006/main">
   <p:cSld>
     <p:bg>
@@ -3702,45 +3862,6 @@
               <a:latin typeface="Avenir Medium" panose="02000503020000020003" pitchFamily="2" charset="0"/>
               <a:ea typeface="Bodoni Ornaments" pitchFamily="2" charset="0"/>
             </a:endParaRPr>
-          </a:p>
-        </p:txBody>
-      </p:sp>
-      <p:sp>
-        <p:nvSpPr>
-          <p:cNvPr id="2" name="TextBox 1">
-            <a:extLst>
-              <a:ext uri="{FF2B5EF4-FFF2-40B4-BE49-F238E27FC236}">
-                <a16:creationId xmlns:a16="http://schemas.microsoft.com/office/drawing/2014/main" id="{5DE5347E-CB9A-43DD-8F01-CD210F411994}"/>
-              </a:ext>
-            </a:extLst>
-          </p:cNvPr>
-          <p:cNvSpPr txBox="1"/>
-          <p:nvPr/>
-        </p:nvSpPr>
-        <p:spPr>
-          <a:xfrm>
-            <a:off x="7390614" y="6488668"/>
-            <a:ext cx="1753386" cy="369332"/>
-          </a:xfrm>
-          <a:prstGeom prst="rect">
-            <a:avLst/>
-          </a:prstGeom>
-          <a:noFill/>
-        </p:spPr>
-        <p:txBody>
-          <a:bodyPr wrap="square" rtlCol="0">
-            <a:spAutoFit/>
-          </a:bodyPr>
-          <a:lstStyle/>
-          <a:p>
-            <a:r>
-              <a:rPr lang="en-US" dirty="0">
-                <a:solidFill>
-                  <a:schemeClr val="bg1"/>
-                </a:solidFill>
-              </a:rPr>
-              <a:t>CCLI#7102397</a:t>
-            </a:r>
           </a:p>
         </p:txBody>
       </p:sp>
